--- a/PRESENTATION.pptx
+++ b/PRESENTATION.pptx
@@ -6401,7 +6401,7 @@
                 </a:solidFill>
                 <a:latin typeface="Calibri"/>
               </a:rPr>
-              <a:t>499</a:t>
+              <a:t>495</a:t>
             </a:r>
           </a:p>
         </p:txBody>
@@ -9448,7 +9448,7 @@
                 </a:solidFill>
                 <a:latin typeface="Calibri"/>
               </a:rPr>
-              <a:t>Inertia drops sharply through K=4–6, silhouette peaks; K=5 is the chosen balance</a:t>
+              <a:t>Silhouette peaks at K=2; we chose K=5 as an interpretability-driven compromise near the elbow</a:t>
             </a:r>
           </a:p>
         </p:txBody>
@@ -9667,7 +9667,7 @@
                 </a:solidFill>
                 <a:latin typeface="Calibri"/>
               </a:rPr>
-              <a:t>Silhouette peak</a:t>
+              <a:t>Silhouette peak (0.393)</a:t>
             </a:r>
           </a:p>
         </p:txBody>
@@ -9748,7 +9748,7 @@
                 </a:solidFill>
                 <a:latin typeface="Calibri"/>
               </a:rPr>
-              <a:t>0.419</a:t>
+              <a:t>K = 5</a:t>
             </a:r>
           </a:p>
         </p:txBody>
@@ -9783,7 +9783,7 @@
                 </a:solidFill>
                 <a:latin typeface="Calibri"/>
               </a:rPr>
-              <a:t>Peak silhouette score</a:t>
+              <a:t>Chosen (silhouette 0.256)</a:t>
             </a:r>
           </a:p>
         </p:txBody>
@@ -9797,28 +9797,28 @@
         <p:spPr>
           <a:xfrm>
             <a:off x="8595360" y="4663440"/>
-            <a:ext cx="3108960" cy="1188720"/>
-          </a:xfrm>
-          <a:prstGeom prst="rect">
-            <a:avLst/>
-          </a:prstGeom>
-          <a:noFill/>
-        </p:spPr>
-        <p:txBody>
-          <a:bodyPr wrap="square" anchor="t">
-            <a:spAutoFit/>
-          </a:bodyPr>
-          <a:lstStyle/>
-          <a:p>
-            <a:pPr algn="l"/>
-            <a:r>
-              <a:rPr sz="1000" b="0">
+            <a:ext cx="3108960" cy="1280160"/>
+          </a:xfrm>
+          <a:prstGeom prst="rect">
+            <a:avLst/>
+          </a:prstGeom>
+          <a:noFill/>
+        </p:spPr>
+        <p:txBody>
+          <a:bodyPr wrap="square" anchor="t">
+            <a:spAutoFit/>
+          </a:bodyPr>
+          <a:lstStyle/>
+          <a:p>
+            <a:pPr algn="l"/>
+            <a:r>
+              <a:rPr sz="900" b="0">
                 <a:solidFill>
                   <a:srgbClr val="1B3A5C"/>
                 </a:solidFill>
                 <a:latin typeface="Calibri"/>
               </a:rPr>
-              <a:t>We use K = 5 — close to the peak with cleaner interpretability for sector comparison.</a:t>
+              <a:t>K=2 maximizes silhouette but produces clusters too coarse for the 11-sector comparison. K=5 trades silhouette for interpretability.</a:t>
             </a:r>
           </a:p>
         </p:txBody>
@@ -10114,7 +10114,7 @@
                 </a:solidFill>
                 <a:latin typeface="Calibri"/>
               </a:rPr>
-              <a:t>PC1 explains 56.7% · PC2 explains 30.2% · combined 87.0% of variance.  Clusters are clean blobs; sectors overlap substantially in this space.</a:t>
+              <a:t>PC1 explains 50.8% · PC2 explains 34.5% · combined 85.3% of variance.  Clusters are clean blobs; sectors overlap substantially in this space.</a:t>
             </a:r>
           </a:p>
         </p:txBody>
@@ -10651,7 +10651,7 @@
                 </a:solidFill>
                 <a:latin typeface="Calibri"/>
               </a:rPr>
-              <a:t>0.047</a:t>
+              <a:t>0.026</a:t>
             </a:r>
           </a:p>
         </p:txBody>
@@ -10767,7 +10767,7 @@
                 </a:solidFill>
                 <a:latin typeface="Calibri"/>
               </a:rPr>
-              <a:t>0.253</a:t>
+              <a:t>0.256</a:t>
             </a:r>
           </a:p>
         </p:txBody>
@@ -11191,7 +11191,7 @@
         <p:spPr>
           <a:xfrm>
             <a:off x="7772400" y="2286000"/>
-            <a:ext cx="2836984" cy="274320"/>
+            <a:ext cx="1137424" cy="274320"/>
           </a:xfrm>
           <a:prstGeom prst="rect">
             <a:avLst/>
@@ -11269,7 +11269,7 @@
         </p:nvSpPr>
         <p:spPr>
           <a:xfrm>
-            <a:off x="10700824" y="2286000"/>
+            <a:off x="9001264" y="2286000"/>
             <a:ext cx="1828800" cy="274320"/>
           </a:xfrm>
           <a:prstGeom prst="rect">
@@ -11291,7 +11291,7 @@
                 </a:solidFill>
                 <a:latin typeface="Calibri"/>
               </a:rPr>
-              <a:t>121 stocks</a:t>
+              <a:t>51 stocks</a:t>
             </a:r>
           </a:p>
         </p:txBody>
@@ -11305,7 +11305,7 @@
         <p:spPr>
           <a:xfrm>
             <a:off x="7772400" y="2743200"/>
-            <a:ext cx="1266092" cy="274320"/>
+            <a:ext cx="2587082" cy="274320"/>
           </a:xfrm>
           <a:prstGeom prst="rect">
             <a:avLst/>
@@ -11383,7 +11383,7 @@
         </p:nvSpPr>
         <p:spPr>
           <a:xfrm>
-            <a:off x="9129932" y="2743200"/>
+            <a:off x="10450922" y="2743200"/>
             <a:ext cx="1828800" cy="274320"/>
           </a:xfrm>
           <a:prstGeom prst="rect">
@@ -11405,7 +11405,7 @@
                 </a:solidFill>
                 <a:latin typeface="Calibri"/>
               </a:rPr>
-              <a:t>54 stocks</a:t>
+              <a:t>116 stocks</a:t>
             </a:r>
           </a:p>
         </p:txBody>
@@ -11419,7 +11419,7 @@
         <p:spPr>
           <a:xfrm>
             <a:off x="7772400" y="3200400"/>
-            <a:ext cx="3657600" cy="274320"/>
+            <a:ext cx="401443" cy="274320"/>
           </a:xfrm>
           <a:prstGeom prst="rect">
             <a:avLst/>
@@ -11497,7 +11497,7 @@
         </p:nvSpPr>
         <p:spPr>
           <a:xfrm>
-            <a:off x="11521440" y="3200400"/>
+            <a:off x="8265283" y="3200400"/>
             <a:ext cx="1828800" cy="274320"/>
           </a:xfrm>
           <a:prstGeom prst="rect">
@@ -11519,7 +11519,7 @@
                 </a:solidFill>
                 <a:latin typeface="Calibri"/>
               </a:rPr>
-              <a:t>156 stocks</a:t>
+              <a:t>18 stocks</a:t>
             </a:r>
           </a:p>
         </p:txBody>
@@ -11533,7 +11533,7 @@
         <p:spPr>
           <a:xfrm>
             <a:off x="7772400" y="3657600"/>
-            <a:ext cx="398584" cy="274320"/>
+            <a:ext cx="3657600" cy="274320"/>
           </a:xfrm>
           <a:prstGeom prst="rect">
             <a:avLst/>
@@ -11611,7 +11611,7 @@
         </p:nvSpPr>
         <p:spPr>
           <a:xfrm>
-            <a:off x="8262424" y="3657600"/>
+            <a:off x="11521440" y="3657600"/>
             <a:ext cx="1828800" cy="274320"/>
           </a:xfrm>
           <a:prstGeom prst="rect">
@@ -11633,7 +11633,7 @@
                 </a:solidFill>
                 <a:latin typeface="Calibri"/>
               </a:rPr>
-              <a:t>17 stocks</a:t>
+              <a:t>164 stocks</a:t>
             </a:r>
           </a:p>
         </p:txBody>
@@ -11647,7 +11647,7 @@
         <p:spPr>
           <a:xfrm>
             <a:off x="7772400" y="4114800"/>
-            <a:ext cx="3540369" cy="274320"/>
+            <a:ext cx="3256156" cy="274320"/>
           </a:xfrm>
           <a:prstGeom prst="rect">
             <a:avLst/>
@@ -11725,7 +11725,7 @@
         </p:nvSpPr>
         <p:spPr>
           <a:xfrm>
-            <a:off x="11404209" y="4114800"/>
+            <a:off x="11119996" y="4114800"/>
             <a:ext cx="1828800" cy="274320"/>
           </a:xfrm>
           <a:prstGeom prst="rect">
@@ -11747,7 +11747,7 @@
                 </a:solidFill>
                 <a:latin typeface="Calibri"/>
               </a:rPr>
-              <a:t>151 stocks</a:t>
+              <a:t>146 stocks</a:t>
             </a:r>
           </a:p>
         </p:txBody>
@@ -15029,7 +15029,7 @@
                 </a:solidFill>
                 <a:latin typeface="Calibri"/>
               </a:rPr>
-              <a:t>Naive 'always-up' baseline accuracy: 0.542 — any model must beat this meaningfully.</a:t>
+              <a:t>Naive 'always-up' baseline accuracy: 0.538 — any model must beat this meaningfully.</a:t>
             </a:r>
           </a:p>
         </p:txBody>
@@ -15266,7 +15266,7 @@
                 </a:solidFill>
                 <a:latin typeface="Calibri"/>
               </a:rPr>
-              <a:t>Does the behavioral cluster label add predictive signal?</a:t>
+              <a:t>Cluster label adds a small but consistent AUC lift across all 4 models</a:t>
             </a:r>
           </a:p>
         </p:txBody>
@@ -15369,7 +15369,7 @@
                 </a:solidFill>
                 <a:latin typeface="Calibri"/>
               </a:rPr>
-              <a:t>Best model</a:t>
+              <a:t>Best ROC-AUC</a:t>
             </a:r>
           </a:p>
         </p:txBody>
@@ -15450,7 +15450,7 @@
                 </a:solidFill>
                 <a:latin typeface="Calibri"/>
               </a:rPr>
-              <a:t>0.514</a:t>
+              <a:t>0.507</a:t>
             </a:r>
           </a:p>
         </p:txBody>
@@ -15485,7 +15485,7 @@
                 </a:solidFill>
                 <a:latin typeface="Calibri"/>
               </a:rPr>
-              <a:t>XGBoost</a:t>
+              <a:t>Decision Tree</a:t>
             </a:r>
           </a:p>
         </p:txBody>
@@ -15520,7 +15520,7 @@
                 </a:solidFill>
                 <a:latin typeface="Calibri"/>
               </a:rPr>
-              <a:t>ROC-AUC delta (avg)</a:t>
+              <a:t>AUC delta (avg)</a:t>
             </a:r>
           </a:p>
         </p:txBody>
@@ -15601,7 +15601,7 @@
                 </a:solidFill>
                 <a:latin typeface="Calibri"/>
               </a:rPr>
-              <a:t>+0.0093</a:t>
+              <a:t>+0.0049</a:t>
             </a:r>
           </a:p>
         </p:txBody>
@@ -15649,6 +15649,41 @@
         </p:nvSpPr>
         <p:spPr>
           <a:xfrm>
+            <a:off x="8595360" y="5029200"/>
+            <a:ext cx="3108960" cy="914400"/>
+          </a:xfrm>
+          <a:prstGeom prst="rect">
+            <a:avLst/>
+          </a:prstGeom>
+          <a:noFill/>
+        </p:spPr>
+        <p:txBody>
+          <a:bodyPr wrap="square" anchor="t">
+            <a:spAutoFit/>
+          </a:bodyPr>
+          <a:lstStyle/>
+          <a:p>
+            <a:pPr algn="l"/>
+            <a:r>
+              <a:rPr sz="900" b="0">
+                <a:solidFill>
+                  <a:srgbClr val="1B3A5C"/>
+                </a:solidFill>
+                <a:latin typeface="Calibri"/>
+              </a:rPr>
+              <a:t>AUC barely above 0.5 — weak ranking signal, consistent with weak-form market efficiency.</a:t>
+            </a:r>
+          </a:p>
+        </p:txBody>
+      </p:sp>
+      <p:sp>
+        <p:nvSpPr>
+          <p:cNvPr id="17" name="TextBox 16"/>
+          <p:cNvSpPr txBox="1"/>
+          <p:nvPr/>
+        </p:nvSpPr>
+        <p:spPr>
+          <a:xfrm>
             <a:off x="457200" y="6492240"/>
             <a:ext cx="7315200" cy="274320"/>
           </a:xfrm>
@@ -15678,7 +15713,7 @@
       </p:sp>
       <p:sp>
         <p:nvSpPr>
-          <p:cNvPr id="17" name="TextBox 16"/>
+          <p:cNvPr id="18" name="TextBox 17"/>
           <p:cNvSpPr txBox="1"/>
           <p:nvPr/>
         </p:nvSpPr>
@@ -16127,7 +16162,7 @@
                 </a:solidFill>
                 <a:latin typeface="Calibri"/>
               </a:rPr>
-              <a:t>importance: 0.096</a:t>
+              <a:t>importance: 0.108</a:t>
             </a:r>
           </a:p>
         </p:txBody>
@@ -16278,7 +16313,7 @@
                 </a:solidFill>
                 <a:latin typeface="Calibri"/>
               </a:rPr>
-              <a:t>importance: 0.085</a:t>
+              <a:t>importance: 0.101</a:t>
             </a:r>
           </a:p>
         </p:txBody>
@@ -16394,7 +16429,7 @@
                 </a:solidFill>
                 <a:latin typeface="Calibri"/>
               </a:rPr>
-              <a:t>ma_50</a:t>
+              <a:t>obv</a:t>
             </a:r>
           </a:p>
         </p:txBody>
@@ -16429,7 +16464,7 @@
                 </a:solidFill>
                 <a:latin typeface="Calibri"/>
               </a:rPr>
-              <a:t>importance: 0.076</a:t>
+              <a:t>importance: 0.093</a:t>
             </a:r>
           </a:p>
         </p:txBody>
@@ -17095,7 +17130,7 @@
                 </a:solidFill>
                 <a:latin typeface="Calibri"/>
               </a:rPr>
-              <a:t>0.514</a:t>
+              <a:t>0.507</a:t>
             </a:r>
           </a:p>
         </p:txBody>
@@ -17130,7 +17165,7 @@
                 </a:solidFill>
                 <a:latin typeface="Calibri"/>
               </a:rPr>
-              <a:t>Best ROC-AUC (XGBoost)</a:t>
+              <a:t>Best ROC-AUC (Decision Tree)</a:t>
             </a:r>
           </a:p>
         </p:txBody>
@@ -17211,7 +17246,7 @@
                 </a:solidFill>
                 <a:latin typeface="Calibri"/>
               </a:rPr>
-              <a:t>0.528</a:t>
+              <a:t>0.533</a:t>
             </a:r>
           </a:p>
         </p:txBody>
@@ -17327,7 +17362,7 @@
                 </a:solidFill>
                 <a:latin typeface="Calibri"/>
               </a:rPr>
-              <a:t>0.542</a:t>
+              <a:t>0.538</a:t>
             </a:r>
           </a:p>
         </p:txBody>
@@ -17362,7 +17397,7 @@
                 </a:solidFill>
                 <a:latin typeface="Calibri"/>
               </a:rPr>
-              <a:t>Naive baseline</a:t>
+              <a:t>Test baseline (always-up)</a:t>
             </a:r>
           </a:p>
         </p:txBody>
@@ -17470,13 +17505,13 @@
           <a:p>
             <a:pPr algn="l"/>
             <a:r>
-              <a:rPr sz="1200" b="0">
+              <a:rPr sz="1100" b="0">
                 <a:solidFill>
                   <a:srgbClr val="FFFFFF"/>
                 </a:solidFill>
                 <a:latin typeface="Calibri"/>
               </a:rPr>
-              <a:t>Behavioral clusters genuinely diverge from GICS sectors (ARI = 0.045). The best model (XGBoost) beats the naive baseline by -1.4% accuracy — modest but meaningful given weak-form efficient market expectations. Cluster label provides a small marginal lift.</a:t>
+              <a:t>Behavioral clusters show weak alignment with GICS sectors (ARI = 0.045). Best ROC-AUC of 0.507 is slightly above random ranking, but best accuracy (0.533) is below the test baseline (0.538) — models do NOT beat the directional baseline. Consistent with weak-form market efficiency. Cluster label gives a small AUC lift.</a:t>
             </a:r>
           </a:p>
         </p:txBody>
@@ -17838,7 +17873,7 @@
                 </a:solidFill>
                 <a:latin typeface="Calibri"/>
               </a:rPr>
-              <a:t>Behavioral clusters ≠ GICS sectors</a:t>
+              <a:t>Behavioral clusters show weak alignment with GICS sectors</a:t>
             </a:r>
           </a:p>
         </p:txBody>
@@ -17873,7 +17908,7 @@
                 </a:solidFill>
                 <a:latin typeface="Calibri"/>
               </a:rPr>
-              <a:t>ARI = 0.045. Clusters group stocks by risk profile (growth, defensive, cyclical), not by industry. The official taxonomy hides this structural lens.</a:t>
+              <a:t>ARI = 0.045 (near 0 = random alignment). Clusters group stocks by risk profile (growth, defensive, cyclical) rather than industry. The official taxonomy does not capture this structural lens. RQ1 supported.</a:t>
             </a:r>
           </a:p>
         </p:txBody>
@@ -18033,7 +18068,7 @@
                 </a:solidFill>
                 <a:latin typeface="Calibri"/>
               </a:rPr>
-              <a:t>Short-term direction prediction is hard but not impossible</a:t>
+              <a:t>Models do NOT beat the naive baseline on accuracy</a:t>
             </a:r>
           </a:p>
         </p:txBody>
@@ -18068,7 +18103,7 @@
                 </a:solidFill>
                 <a:latin typeface="Calibri"/>
               </a:rPr>
-              <a:t>Best ROC-AUC: 0.514, accuracy: 0.528. Above the 0.542 naive baseline. Aligns with weak-form market efficiency — technicals contain real but small signal.</a:t>
+              <a:t>Best ROC-AUC = 0.507 — slightly above random ranking. Best accuracy = 0.533, BELOW the test-set always-up baseline of 0.538. Weak ranking signal exists but cannot translate into directional accuracy. Consistent with weak-form market efficiency.</a:t>
             </a:r>
           </a:p>
         </p:txBody>
@@ -18228,7 +18263,7 @@
                 </a:solidFill>
                 <a:latin typeface="Calibri"/>
               </a:rPr>
-              <a:t>Cluster label adds marginal but real predictive value</a:t>
+              <a:t>Cluster label adds a small AUC lift</a:t>
             </a:r>
           </a:p>
         </p:txBody>
@@ -18263,7 +18298,7 @@
                 </a:solidFill>
                 <a:latin typeface="Calibri"/>
               </a:rPr>
-              <a:t>Adding the cluster label changed average ROC-AUC by +0.0093. It's partially redundant with technicals, but still validates the two-part design.</a:t>
+              <a:t>Adding one-hot encoded cluster labels changed average ROC-AUC by +0.0049. Lift is consistent but small; warrants statistical significance testing in future work before any operational use.</a:t>
             </a:r>
           </a:p>
         </p:txBody>
@@ -20342,7 +20377,7 @@
                 </a:solidFill>
                 <a:latin typeface="Calibri"/>
               </a:rPr>
-              <a:t>The 2023–24 AI boom — a real-world example of the gap</a:t>
+              <a:t>The AI boom — a real-world example of the cross-sector gap</a:t>
             </a:r>
           </a:p>
         </p:txBody>
@@ -20412,7 +20447,7 @@
                 </a:solidFill>
                 <a:latin typeface="Calibri"/>
               </a:rPr>
-              <a:t>Three stocks that moved together for the same reason — but live in different GICS sectors:</a:t>
+              <a:t>Three stocks that moved together for the same AI-infrastructure reason — across IT and Utilities sectors:</a:t>
             </a:r>
           </a:p>
         </p:txBody>
@@ -20516,7 +20551,7 @@
         <p:spPr>
           <a:xfrm>
             <a:off x="777240" y="2606040"/>
-            <a:ext cx="2926080" cy="365760"/>
+            <a:ext cx="3291840" cy="365760"/>
           </a:xfrm>
           <a:prstGeom prst="rect">
             <a:avLst/>
@@ -20537,7 +20572,7 @@
                 </a:solidFill>
                 <a:latin typeface="Calibri"/>
               </a:rPr>
-              <a:t>NVDA</a:t>
+              <a:t>NVDA (Nvidia)</a:t>
             </a:r>
           </a:p>
         </p:txBody>
@@ -20551,7 +20586,7 @@
         <p:spPr>
           <a:xfrm>
             <a:off x="777240" y="2926080"/>
-            <a:ext cx="2926080" cy="365760"/>
+            <a:ext cx="3291840" cy="365760"/>
           </a:xfrm>
           <a:prstGeom prst="rect">
             <a:avLst/>
@@ -20585,8 +20620,8 @@
         </p:nvSpPr>
         <p:spPr>
           <a:xfrm>
-            <a:off x="4023360" y="2743200"/>
-            <a:ext cx="4572000" cy="365760"/>
+            <a:off x="4297680" y="2743200"/>
+            <a:ext cx="4389120" cy="365760"/>
           </a:xfrm>
           <a:prstGeom prst="rect">
             <a:avLst/>
@@ -20620,8 +20655,8 @@
         </p:nvSpPr>
         <p:spPr>
           <a:xfrm>
-            <a:off x="9601200" y="2697480"/>
-            <a:ext cx="1737360" cy="365760"/>
+            <a:off x="9144000" y="2697480"/>
+            <a:ext cx="2194560" cy="365760"/>
           </a:xfrm>
           <a:prstGeom prst="rect">
             <a:avLst/>
@@ -20655,8 +20690,8 @@
         </p:nvSpPr>
         <p:spPr>
           <a:xfrm>
-            <a:off x="9601200" y="2971800"/>
-            <a:ext cx="1737360" cy="365760"/>
+            <a:off x="9144000" y="2971800"/>
+            <a:ext cx="2194560" cy="365760"/>
           </a:xfrm>
           <a:prstGeom prst="rect">
             <a:avLst/>
@@ -20677,7 +20712,7 @@
                 </a:solidFill>
                 <a:latin typeface="Calibri"/>
               </a:rPr>
-              <a:t>2023 return</a:t>
+              <a:t>2023 calendar return</a:t>
             </a:r>
           </a:p>
         </p:txBody>
@@ -20781,7 +20816,7 @@
         <p:spPr>
           <a:xfrm>
             <a:off x="777240" y="3566160"/>
-            <a:ext cx="2926080" cy="365760"/>
+            <a:ext cx="3291840" cy="365760"/>
           </a:xfrm>
           <a:prstGeom prst="rect">
             <a:avLst/>
@@ -20816,7 +20851,7 @@
         <p:spPr>
           <a:xfrm>
             <a:off x="777240" y="3886200"/>
-            <a:ext cx="2926080" cy="365760"/>
+            <a:ext cx="3291840" cy="365760"/>
           </a:xfrm>
           <a:prstGeom prst="rect">
             <a:avLst/>
@@ -20850,8 +20885,8 @@
         </p:nvSpPr>
         <p:spPr>
           <a:xfrm>
-            <a:off x="4023360" y="3703320"/>
-            <a:ext cx="4572000" cy="365760"/>
+            <a:off x="4297680" y="3703320"/>
+            <a:ext cx="4389120" cy="365760"/>
           </a:xfrm>
           <a:prstGeom prst="rect">
             <a:avLst/>
@@ -20885,8 +20920,8 @@
         </p:nvSpPr>
         <p:spPr>
           <a:xfrm>
-            <a:off x="9601200" y="3657600"/>
-            <a:ext cx="1737360" cy="365760"/>
+            <a:off x="9144000" y="3657600"/>
+            <a:ext cx="2194560" cy="365760"/>
           </a:xfrm>
           <a:prstGeom prst="rect">
             <a:avLst/>
@@ -20907,7 +20942,7 @@
                 </a:solidFill>
                 <a:latin typeface="Calibri"/>
               </a:rPr>
-              <a:t>+148%</a:t>
+              <a:t>+93%</a:t>
             </a:r>
           </a:p>
         </p:txBody>
@@ -20920,8 +20955,8 @@
         </p:nvSpPr>
         <p:spPr>
           <a:xfrm>
-            <a:off x="9601200" y="3931920"/>
-            <a:ext cx="1737360" cy="365760"/>
+            <a:off x="9144000" y="3931920"/>
+            <a:ext cx="2194560" cy="365760"/>
           </a:xfrm>
           <a:prstGeom prst="rect">
             <a:avLst/>
@@ -20942,7 +20977,7 @@
                 </a:solidFill>
                 <a:latin typeface="Calibri"/>
               </a:rPr>
-              <a:t>2023 return</a:t>
+              <a:t>2024 calendar return</a:t>
             </a:r>
           </a:p>
         </p:txBody>
@@ -21046,7 +21081,7 @@
         <p:spPr>
           <a:xfrm>
             <a:off x="777240" y="4526280"/>
-            <a:ext cx="2926080" cy="365760"/>
+            <a:ext cx="3291840" cy="365760"/>
           </a:xfrm>
           <a:prstGeom prst="rect">
             <a:avLst/>
@@ -21081,7 +21116,7 @@
         <p:spPr>
           <a:xfrm>
             <a:off x="777240" y="4846320"/>
-            <a:ext cx="2926080" cy="365760"/>
+            <a:ext cx="3291840" cy="365760"/>
           </a:xfrm>
           <a:prstGeom prst="rect">
             <a:avLst/>
@@ -21115,8 +21150,8 @@
         </p:nvSpPr>
         <p:spPr>
           <a:xfrm>
-            <a:off x="4023360" y="4663440"/>
-            <a:ext cx="4572000" cy="365760"/>
+            <a:off x="4297680" y="4663440"/>
+            <a:ext cx="4389120" cy="365760"/>
           </a:xfrm>
           <a:prstGeom prst="rect">
             <a:avLst/>
@@ -21150,8 +21185,8 @@
         </p:nvSpPr>
         <p:spPr>
           <a:xfrm>
-            <a:off x="9601200" y="4617720"/>
-            <a:ext cx="1737360" cy="365760"/>
+            <a:off x="9144000" y="4617720"/>
+            <a:ext cx="2194560" cy="365760"/>
           </a:xfrm>
           <a:prstGeom prst="rect">
             <a:avLst/>
@@ -21172,7 +21207,7 @@
                 </a:solidFill>
                 <a:latin typeface="Calibri"/>
               </a:rPr>
-              <a:t>+260%</a:t>
+              <a:t>+258%</a:t>
             </a:r>
           </a:p>
         </p:txBody>
@@ -21185,8 +21220,8 @@
         </p:nvSpPr>
         <p:spPr>
           <a:xfrm>
-            <a:off x="9601200" y="4892040"/>
-            <a:ext cx="1737360" cy="365760"/>
+            <a:off x="9144000" y="4892040"/>
+            <a:ext cx="2194560" cy="365760"/>
           </a:xfrm>
           <a:prstGeom prst="rect">
             <a:avLst/>
@@ -21207,7 +21242,7 @@
                 </a:solidFill>
                 <a:latin typeface="Calibri"/>
               </a:rPr>
-              <a:t>2023 return</a:t>
+              <a:t>2024 calendar return</a:t>
             </a:r>
           </a:p>
         </p:txBody>
@@ -21242,7 +21277,7 @@
                 </a:solidFill>
                 <a:latin typeface="Calibri"/>
               </a:rPr>
-              <a:t>GICS calls these three stocks completely different sectors. Their stocks behaved nearly identically.</a:t>
+              <a:t>Different GICS sectors (IT vs Utilities) — but their stocks rallied on the same macro narrative.</a:t>
             </a:r>
           </a:p>
         </p:txBody>
@@ -23396,7 +23431,7 @@
                 </a:solidFill>
                 <a:latin typeface="Calibri"/>
               </a:rPr>
-              <a:t>29</a:t>
+              <a:t>19</a:t>
             </a:r>
           </a:p>
         </p:txBody>

--- a/PRESENTATION.pptx
+++ b/PRESENTATION.pptx
@@ -4913,7 +4913,7 @@
                 </a:solidFill>
                 <a:latin typeface="Calibri"/>
               </a:rPr>
-              <a:t>Each stock collapses 5 years of daily data into a single 7-feature vector</a:t>
+              <a:t>Each stock collapses its 2019–2022 training window into a single 7-feature vector (leakage-free for downstream classification)</a:t>
             </a:r>
           </a:p>
         </p:txBody>
@@ -6182,7 +6182,7 @@
                 </a:solidFill>
                 <a:latin typeface="Calibri"/>
               </a:rPr>
-              <a:t>1.  ~1,500 days × 8 indicators per stock</a:t>
+              <a:t>1.  ~1,000 train days × 8 indicators per stock</a:t>
             </a:r>
           </a:p>
         </p:txBody>
@@ -6322,7 +6322,7 @@
                 </a:solidFill>
                 <a:latin typeface="Calibri"/>
               </a:rPr>
-              <a:t>5.  Cluster on this 7-D vector</a:t>
+              <a:t>5.  Cluster on this 7-D vector (leakage-free)</a:t>
             </a:r>
           </a:p>
         </p:txBody>
@@ -10816,28 +10816,28 @@
         <p:spPr>
           <a:xfrm>
             <a:off x="8229600" y="5577840"/>
-            <a:ext cx="3383280" cy="457200"/>
-          </a:xfrm>
-          <a:prstGeom prst="rect">
-            <a:avLst/>
-          </a:prstGeom>
-          <a:noFill/>
-        </p:spPr>
-        <p:txBody>
-          <a:bodyPr wrap="square" anchor="t">
-            <a:spAutoFit/>
-          </a:bodyPr>
-          <a:lstStyle/>
-          <a:p>
-            <a:pPr algn="l"/>
-            <a:r>
-              <a:rPr sz="1000" b="0">
+            <a:ext cx="3383280" cy="640080"/>
+          </a:xfrm>
+          <a:prstGeom prst="rect">
+            <a:avLst/>
+          </a:prstGeom>
+          <a:noFill/>
+        </p:spPr>
+        <p:txBody>
+          <a:bodyPr wrap="square" anchor="t">
+            <a:spAutoFit/>
+          </a:bodyPr>
+          <a:lstStyle/>
+          <a:p>
+            <a:pPr algn="l"/>
+            <a:r>
+              <a:rPr sz="900" b="0">
                 <a:solidFill>
                   <a:srgbClr val="6C757D"/>
                 </a:solidFill>
                 <a:latin typeface="Calibri"/>
               </a:rPr>
-              <a:t>ARI = 0 → independent · ARI = 1 → identical</a:t>
+              <a:t>ARI near 0 = close to random agreement · 1 = identical · can be negative for highly discordant</a:t>
             </a:r>
           </a:p>
         </p:txBody>
@@ -15908,7 +15908,7 @@
                 </a:solidFill>
                 <a:latin typeface="Calibri"/>
               </a:rPr>
-              <a:t>Random Forest feature importance — RSI and momentum dominate</a:t>
+              <a:t>Random Forest feature importance — risk, volatility, and volume dominate</a:t>
             </a:r>
           </a:p>
         </p:txBody>
@@ -20175,7 +20175,7 @@
                 </a:solidFill>
                 <a:latin typeface="Calibri"/>
               </a:rPr>
-              <a:t>Do technical indicators, augmented with behavioral cluster labels from RQ1, improve classification accuracy for predicting whether a stock's 5-day forward return is positive?</a:t>
+              <a:t>Do technical indicators, augmented with behavioral cluster labels from RQ1, improve classification performance — specifically ROC-AUC — for predicting whether a stock's 5-day forward return is positive?</a:t>
             </a:r>
           </a:p>
         </p:txBody>
@@ -20942,7 +20942,7 @@
                 </a:solidFill>
                 <a:latin typeface="Calibri"/>
               </a:rPr>
-              <a:t>+93%</a:t>
+              <a:t>~+91%</a:t>
             </a:r>
           </a:p>
         </p:txBody>
@@ -21207,7 +21207,7 @@
                 </a:solidFill>
                 <a:latin typeface="Calibri"/>
               </a:rPr>
-              <a:t>+258%</a:t>
+              <a:t>~+258%</a:t>
             </a:r>
           </a:p>
         </p:txBody>
